--- a/(5.13) 레벨.pptx
+++ b/(5.13) 레벨.pptx
@@ -121,15 +121,12 @@
       </a:defRPr>
     </a:lvl9pPr>
   </p:defaultTextStyle>
+  <p:extLst>
+    <p:ext uri="{EFAFB233-063F-42B5-8137-9DF3F51BA10A}">
+      <p15:sldGuideLst xmlns:p15="http://schemas.microsoft.com/office/powerpoint/2012/main"/>
+    </p:ext>
+  </p:extLst>
 </p:presentation>
-</file>
-
-<file path=ppt/revisionInfo.xml><?xml version="1.0" encoding="utf-8"?>
-<p1510:revInfo xmlns:a="http://schemas.openxmlformats.org/drawingml/2006/main" xmlns:r="http://schemas.openxmlformats.org/officeDocument/2006/relationships" xmlns:p1510="http://schemas.microsoft.com/office/powerpoint/2015/10/main">
-  <p1510:revLst>
-    <p1510:client id="{5939AC3C-0530-4E6B-900B-8AACC9C0FDA0}" v="9" dt="2026-05-13T06:16:09.775"/>
-  </p1510:revLst>
-</p1510:revInfo>
 </file>
 
 <file path=ppt/changesInfos/changesInfo1.xml><?xml version="1.0" encoding="utf-8"?>
@@ -137,17 +134,10 @@
   <pc:docChgLst>
     <pc:chgData name="musukie52@gmail.com" userId="017bd91f96aa8751" providerId="LiveId" clId="{5B2C3894-F97E-4CAB-8812-5BB4D83AAC6A}"/>
     <pc:docChg chg="undo custSel addSld delSld modSld sldOrd">
-      <pc:chgData name="musukie52@gmail.com" userId="017bd91f96aa8751" providerId="LiveId" clId="{5B2C3894-F97E-4CAB-8812-5BB4D83AAC6A}" dt="2026-05-13T06:54:55.363" v="11963" actId="20577"/>
+      <pc:chgData name="musukie52@gmail.com" userId="017bd91f96aa8751" providerId="LiveId" clId="{5B2C3894-F97E-4CAB-8812-5BB4D83AAC6A}" dt="2026-05-18T00:30:51.531" v="11979" actId="20577"/>
       <pc:docMkLst>
         <pc:docMk/>
       </pc:docMkLst>
-      <pc:sldChg chg="new del">
-        <pc:chgData name="musukie52@gmail.com" userId="017bd91f96aa8751" providerId="LiveId" clId="{5B2C3894-F97E-4CAB-8812-5BB4D83AAC6A}" dt="2026-05-13T05:01:45.513" v="2" actId="47"/>
-        <pc:sldMkLst>
-          <pc:docMk/>
-          <pc:sldMk cId="1799856730" sldId="256"/>
-        </pc:sldMkLst>
-      </pc:sldChg>
       <pc:sldChg chg="modSp new mod">
         <pc:chgData name="musukie52@gmail.com" userId="017bd91f96aa8751" providerId="LiveId" clId="{5B2C3894-F97E-4CAB-8812-5BB4D83AAC6A}" dt="2026-05-13T05:11:44.051" v="579" actId="20577"/>
         <pc:sldMkLst>
@@ -200,22 +190,6 @@
           <pc:docMk/>
           <pc:sldMk cId="3249326489" sldId="259"/>
         </pc:sldMkLst>
-        <pc:spChg chg="del">
-          <ac:chgData name="musukie52@gmail.com" userId="017bd91f96aa8751" providerId="LiveId" clId="{5B2C3894-F97E-4CAB-8812-5BB4D83AAC6A}" dt="2026-05-13T05:23:30.933" v="1396" actId="478"/>
-          <ac:spMkLst>
-            <pc:docMk/>
-            <pc:sldMk cId="3249326489" sldId="259"/>
-            <ac:spMk id="2" creationId="{6DBA453F-A5D6-7F57-3971-64829737974E}"/>
-          </ac:spMkLst>
-        </pc:spChg>
-        <pc:spChg chg="del">
-          <ac:chgData name="musukie52@gmail.com" userId="017bd91f96aa8751" providerId="LiveId" clId="{5B2C3894-F97E-4CAB-8812-5BB4D83AAC6A}" dt="2026-05-13T05:23:30.933" v="1396" actId="478"/>
-          <ac:spMkLst>
-            <pc:docMk/>
-            <pc:sldMk cId="3249326489" sldId="259"/>
-            <ac:spMk id="3" creationId="{70EC0277-7036-1BCC-AB04-8D72C92DEAE1}"/>
-          </ac:spMkLst>
-        </pc:spChg>
         <pc:picChg chg="add">
           <ac:chgData name="musukie52@gmail.com" userId="017bd91f96aa8751" providerId="LiveId" clId="{5B2C3894-F97E-4CAB-8812-5BB4D83AAC6A}" dt="2026-05-13T05:23:32.204" v="1397" actId="22"/>
           <ac:picMkLst>
@@ -377,14 +351,6 @@
           <pc:docMk/>
           <pc:sldMk cId="3336693473" sldId="266"/>
         </pc:sldMkLst>
-        <pc:spChg chg="del">
-          <ac:chgData name="musukie52@gmail.com" userId="017bd91f96aa8751" providerId="LiveId" clId="{5B2C3894-F97E-4CAB-8812-5BB4D83AAC6A}" dt="2026-05-13T05:59:17.564" v="5355" actId="478"/>
-          <ac:spMkLst>
-            <pc:docMk/>
-            <pc:sldMk cId="3336693473" sldId="266"/>
-            <ac:spMk id="2" creationId="{558D7628-72BB-3269-CDE0-85ACD0AD841F}"/>
-          </ac:spMkLst>
-        </pc:spChg>
         <pc:spChg chg="mod">
           <ac:chgData name="musukie52@gmail.com" userId="017bd91f96aa8751" providerId="LiveId" clId="{5B2C3894-F97E-4CAB-8812-5BB4D83AAC6A}" dt="2026-05-13T06:02:51.603" v="6133" actId="20577"/>
           <ac:spMkLst>
@@ -423,14 +389,6 @@
           <pc:docMk/>
           <pc:sldMk cId="919262126" sldId="268"/>
         </pc:sldMkLst>
-        <pc:spChg chg="del">
-          <ac:chgData name="musukie52@gmail.com" userId="017bd91f96aa8751" providerId="LiveId" clId="{5B2C3894-F97E-4CAB-8812-5BB4D83AAC6A}" dt="2026-05-13T06:07:42.650" v="7058" actId="478"/>
-          <ac:spMkLst>
-            <pc:docMk/>
-            <pc:sldMk cId="919262126" sldId="268"/>
-            <ac:spMk id="2" creationId="{6BC6FA41-DA90-1481-3101-367F660E152D}"/>
-          </ac:spMkLst>
-        </pc:spChg>
         <pc:spChg chg="mod">
           <ac:chgData name="musukie52@gmail.com" userId="017bd91f96aa8751" providerId="LiveId" clId="{5B2C3894-F97E-4CAB-8812-5BB4D83AAC6A}" dt="2026-05-13T06:16:04.739" v="8516" actId="20577"/>
           <ac:spMkLst>
@@ -449,13 +407,13 @@
         </pc:spChg>
       </pc:sldChg>
       <pc:sldChg chg="modSp add mod">
-        <pc:chgData name="musukie52@gmail.com" userId="017bd91f96aa8751" providerId="LiveId" clId="{5B2C3894-F97E-4CAB-8812-5BB4D83AAC6A}" dt="2026-05-13T06:12:51.017" v="7793" actId="20577"/>
+        <pc:chgData name="musukie52@gmail.com" userId="017bd91f96aa8751" providerId="LiveId" clId="{5B2C3894-F97E-4CAB-8812-5BB4D83AAC6A}" dt="2026-05-18T00:30:51.531" v="11979" actId="20577"/>
         <pc:sldMkLst>
           <pc:docMk/>
           <pc:sldMk cId="2823851658" sldId="269"/>
         </pc:sldMkLst>
         <pc:spChg chg="mod">
-          <ac:chgData name="musukie52@gmail.com" userId="017bd91f96aa8751" providerId="LiveId" clId="{5B2C3894-F97E-4CAB-8812-5BB4D83AAC6A}" dt="2026-05-13T06:12:51.017" v="7793" actId="20577"/>
+          <ac:chgData name="musukie52@gmail.com" userId="017bd91f96aa8751" providerId="LiveId" clId="{5B2C3894-F97E-4CAB-8812-5BB4D83AAC6A}" dt="2026-05-18T00:30:51.531" v="11979" actId="20577"/>
           <ac:spMkLst>
             <pc:docMk/>
             <pc:sldMk cId="2823851658" sldId="269"/>
@@ -698,7 +656,7 @@
           <a:p>
             <a:fld id="{B1D9842E-94EB-4E29-B51A-CD0127B4511F}" type="datetimeFigureOut">
               <a:rPr lang="ko-KR" altLang="en-US" smtClean="0"/>
-              <a:t>2026-05-13</a:t>
+              <a:t>2026-05-18</a:t>
             </a:fld>
             <a:endParaRPr lang="ko-KR" altLang="en-US"/>
           </a:p>
@@ -896,7 +854,7 @@
           <a:p>
             <a:fld id="{B1D9842E-94EB-4E29-B51A-CD0127B4511F}" type="datetimeFigureOut">
               <a:rPr lang="ko-KR" altLang="en-US" smtClean="0"/>
-              <a:t>2026-05-13</a:t>
+              <a:t>2026-05-18</a:t>
             </a:fld>
             <a:endParaRPr lang="ko-KR" altLang="en-US"/>
           </a:p>
@@ -1104,7 +1062,7 @@
           <a:p>
             <a:fld id="{B1D9842E-94EB-4E29-B51A-CD0127B4511F}" type="datetimeFigureOut">
               <a:rPr lang="ko-KR" altLang="en-US" smtClean="0"/>
-              <a:t>2026-05-13</a:t>
+              <a:t>2026-05-18</a:t>
             </a:fld>
             <a:endParaRPr lang="ko-KR" altLang="en-US"/>
           </a:p>
@@ -1302,7 +1260,7 @@
           <a:p>
             <a:fld id="{B1D9842E-94EB-4E29-B51A-CD0127B4511F}" type="datetimeFigureOut">
               <a:rPr lang="ko-KR" altLang="en-US" smtClean="0"/>
-              <a:t>2026-05-13</a:t>
+              <a:t>2026-05-18</a:t>
             </a:fld>
             <a:endParaRPr lang="ko-KR" altLang="en-US"/>
           </a:p>
@@ -1577,7 +1535,7 @@
           <a:p>
             <a:fld id="{B1D9842E-94EB-4E29-B51A-CD0127B4511F}" type="datetimeFigureOut">
               <a:rPr lang="ko-KR" altLang="en-US" smtClean="0"/>
-              <a:t>2026-05-13</a:t>
+              <a:t>2026-05-18</a:t>
             </a:fld>
             <a:endParaRPr lang="ko-KR" altLang="en-US"/>
           </a:p>
@@ -1842,7 +1800,7 @@
           <a:p>
             <a:fld id="{B1D9842E-94EB-4E29-B51A-CD0127B4511F}" type="datetimeFigureOut">
               <a:rPr lang="ko-KR" altLang="en-US" smtClean="0"/>
-              <a:t>2026-05-13</a:t>
+              <a:t>2026-05-18</a:t>
             </a:fld>
             <a:endParaRPr lang="ko-KR" altLang="en-US"/>
           </a:p>
@@ -2254,7 +2212,7 @@
           <a:p>
             <a:fld id="{B1D9842E-94EB-4E29-B51A-CD0127B4511F}" type="datetimeFigureOut">
               <a:rPr lang="ko-KR" altLang="en-US" smtClean="0"/>
-              <a:t>2026-05-13</a:t>
+              <a:t>2026-05-18</a:t>
             </a:fld>
             <a:endParaRPr lang="ko-KR" altLang="en-US"/>
           </a:p>
@@ -2395,7 +2353,7 @@
           <a:p>
             <a:fld id="{B1D9842E-94EB-4E29-B51A-CD0127B4511F}" type="datetimeFigureOut">
               <a:rPr lang="ko-KR" altLang="en-US" smtClean="0"/>
-              <a:t>2026-05-13</a:t>
+              <a:t>2026-05-18</a:t>
             </a:fld>
             <a:endParaRPr lang="ko-KR" altLang="en-US"/>
           </a:p>
@@ -2508,7 +2466,7 @@
           <a:p>
             <a:fld id="{B1D9842E-94EB-4E29-B51A-CD0127B4511F}" type="datetimeFigureOut">
               <a:rPr lang="ko-KR" altLang="en-US" smtClean="0"/>
-              <a:t>2026-05-13</a:t>
+              <a:t>2026-05-18</a:t>
             </a:fld>
             <a:endParaRPr lang="ko-KR" altLang="en-US"/>
           </a:p>
@@ -2819,7 +2777,7 @@
           <a:p>
             <a:fld id="{B1D9842E-94EB-4E29-B51A-CD0127B4511F}" type="datetimeFigureOut">
               <a:rPr lang="ko-KR" altLang="en-US" smtClean="0"/>
-              <a:t>2026-05-13</a:t>
+              <a:t>2026-05-18</a:t>
             </a:fld>
             <a:endParaRPr lang="ko-KR" altLang="en-US"/>
           </a:p>
@@ -3107,7 +3065,7 @@
           <a:p>
             <a:fld id="{B1D9842E-94EB-4E29-B51A-CD0127B4511F}" type="datetimeFigureOut">
               <a:rPr lang="ko-KR" altLang="en-US" smtClean="0"/>
-              <a:t>2026-05-13</a:t>
+              <a:t>2026-05-18</a:t>
             </a:fld>
             <a:endParaRPr lang="ko-KR" altLang="en-US"/>
           </a:p>
@@ -3348,7 +3306,7 @@
           <a:p>
             <a:fld id="{B1D9842E-94EB-4E29-B51A-CD0127B4511F}" type="datetimeFigureOut">
               <a:rPr lang="ko-KR" altLang="en-US" smtClean="0"/>
-              <a:t>2026-05-13</a:t>
+              <a:t>2026-05-18</a:t>
             </a:fld>
             <a:endParaRPr lang="ko-KR" altLang="en-US"/>
           </a:p>
@@ -4509,6 +4467,10 @@
           </a:p>
           <a:p>
             <a:r>
+              <a:rPr lang="ko-KR" altLang="en-US" dirty="0"/>
+              <a:t>이 게임의 </a:t>
+            </a:r>
+            <a:r>
               <a:rPr lang="ko-KR" altLang="en-US" dirty="0" err="1"/>
               <a:t>클리셰</a:t>
             </a:r>
